--- a/Reporte 060726.pptx
+++ b/Reporte 060726.pptx
@@ -5,7 +5,7 @@
     <p:sldMasterId id="2147483672" r:id="rId1"/>
   </p:sldMasterIdLst>
   <p:notesMasterIdLst>
-    <p:notesMasterId r:id="rId19"/>
+    <p:notesMasterId r:id="rId18"/>
   </p:notesMasterIdLst>
   <p:sldIdLst>
     <p:sldId id="350" r:id="rId2"/>
@@ -22,25 +22,24 @@
     <p:sldId id="369" r:id="rId13"/>
     <p:sldId id="361" r:id="rId14"/>
     <p:sldId id="371" r:id="rId15"/>
-    <p:sldId id="407" r:id="rId16"/>
-    <p:sldId id="400" r:id="rId17"/>
-    <p:sldId id="280" r:id="rId18"/>
+    <p:sldId id="400" r:id="rId16"/>
+    <p:sldId id="280" r:id="rId17"/>
   </p:sldIdLst>
   <p:sldSz cx="9144000" cy="5143500" type="screen16x9"/>
   <p:notesSz cx="6858000" cy="9144000"/>
   <p:embeddedFontLst>
     <p:embeddedFont>
       <p:font typeface="Montserrat" panose="00000500000000000000" pitchFamily="2" charset="0"/>
-      <p:regular r:id="rId20"/>
-      <p:bold r:id="rId21"/>
-      <p:italic r:id="rId22"/>
-      <p:boldItalic r:id="rId23"/>
+      <p:regular r:id="rId19"/>
+      <p:bold r:id="rId20"/>
+      <p:italic r:id="rId21"/>
+      <p:boldItalic r:id="rId22"/>
     </p:embeddedFont>
     <p:embeddedFont>
       <p:font typeface="Montserrat Black" panose="00000A00000000000000" pitchFamily="2" charset="0"/>
-      <p:bold r:id="rId24"/>
-      <p:italic r:id="rId25"/>
-      <p:boldItalic r:id="rId26"/>
+      <p:bold r:id="rId23"/>
+      <p:italic r:id="rId24"/>
+      <p:boldItalic r:id="rId25"/>
     </p:embeddedFont>
   </p:embeddedFontLst>
   <p:defaultTextStyle>
@@ -6544,10 +6543,10 @@
       </p:sp>
       <p:pic>
         <p:nvPicPr>
-          <p:cNvPr id="4" name="Imagen 3">
+          <p:cNvPr id="5" name="Imagen 4">
             <a:extLst>
               <a:ext uri="{FF2B5EF4-FFF2-40B4-BE49-F238E27FC236}">
-                <a16:creationId xmlns:a16="http://schemas.microsoft.com/office/drawing/2014/main" id="{DD31A439-4E7A-EE11-0580-AE47C4BD7BD2}"/>
+                <a16:creationId xmlns:a16="http://schemas.microsoft.com/office/drawing/2014/main" id="{48003067-6DE6-0282-3648-52DEDE3848AF}"/>
               </a:ext>
             </a:extLst>
           </p:cNvPr>
@@ -6564,8 +6563,8 @@
         </p:blipFill>
         <p:spPr>
           <a:xfrm>
-            <a:off x="0" y="628149"/>
-            <a:ext cx="9144000" cy="4030077"/>
+            <a:off x="0" y="666448"/>
+            <a:ext cx="9144000" cy="3953480"/>
           </a:xfrm>
           <a:prstGeom prst="rect">
             <a:avLst/>
@@ -6642,10 +6641,10 @@
       </p:sp>
       <p:pic>
         <p:nvPicPr>
-          <p:cNvPr id="3" name="Imagen 2">
+          <p:cNvPr id="4" name="Imagen 3">
             <a:extLst>
               <a:ext uri="{FF2B5EF4-FFF2-40B4-BE49-F238E27FC236}">
-                <a16:creationId xmlns:a16="http://schemas.microsoft.com/office/drawing/2014/main" id="{3DC540BB-D235-57BC-C8A9-758C7905153F}"/>
+                <a16:creationId xmlns:a16="http://schemas.microsoft.com/office/drawing/2014/main" id="{9FABD344-BF12-4110-84B5-F4EFB6F70074}"/>
               </a:ext>
             </a:extLst>
           </p:cNvPr>
@@ -6662,8 +6661,8 @@
         </p:blipFill>
         <p:spPr>
           <a:xfrm>
-            <a:off x="0" y="1179536"/>
-            <a:ext cx="9144000" cy="2927304"/>
+            <a:off x="0" y="1165884"/>
+            <a:ext cx="9144000" cy="2954607"/>
           </a:xfrm>
           <a:prstGeom prst="rect">
             <a:avLst/>
@@ -6746,10 +6745,10 @@
       </p:sp>
       <p:pic>
         <p:nvPicPr>
-          <p:cNvPr id="3" name="Imagen 2">
+          <p:cNvPr id="4" name="Imagen 3">
             <a:extLst>
               <a:ext uri="{FF2B5EF4-FFF2-40B4-BE49-F238E27FC236}">
-                <a16:creationId xmlns:a16="http://schemas.microsoft.com/office/drawing/2014/main" id="{BE53245D-3937-BA4E-63D3-95EA76958B66}"/>
+                <a16:creationId xmlns:a16="http://schemas.microsoft.com/office/drawing/2014/main" id="{C54193F9-8DFA-A6E5-9877-F6B7DC8586C4}"/>
               </a:ext>
             </a:extLst>
           </p:cNvPr>
@@ -6766,8 +6765,8 @@
         </p:blipFill>
         <p:spPr>
           <a:xfrm>
-            <a:off x="0" y="976710"/>
-            <a:ext cx="9144000" cy="3332955"/>
+            <a:off x="0" y="459496"/>
+            <a:ext cx="9144000" cy="4367383"/>
           </a:xfrm>
           <a:prstGeom prst="rect">
             <a:avLst/>
@@ -6844,10 +6843,10 @@
       </p:sp>
       <p:pic>
         <p:nvPicPr>
-          <p:cNvPr id="5" name="Imagen 4">
+          <p:cNvPr id="4" name="Imagen 3">
             <a:extLst>
               <a:ext uri="{FF2B5EF4-FFF2-40B4-BE49-F238E27FC236}">
-                <a16:creationId xmlns:a16="http://schemas.microsoft.com/office/drawing/2014/main" id="{F4C60C86-3DB6-3118-4D26-64C7AB1E02BE}"/>
+                <a16:creationId xmlns:a16="http://schemas.microsoft.com/office/drawing/2014/main" id="{E9453BFF-46CF-7224-D0E2-39FADF4B1B78}"/>
               </a:ext>
             </a:extLst>
           </p:cNvPr>
@@ -6864,8 +6863,8 @@
         </p:blipFill>
         <p:spPr>
           <a:xfrm>
-            <a:off x="0" y="1097974"/>
-            <a:ext cx="9144000" cy="3090428"/>
+            <a:off x="0" y="1084319"/>
+            <a:ext cx="9144000" cy="3117737"/>
           </a:xfrm>
           <a:prstGeom prst="rect">
             <a:avLst/>
@@ -6942,10 +6941,10 @@
       </p:sp>
       <p:pic>
         <p:nvPicPr>
-          <p:cNvPr id="3" name="Imagen 2">
+          <p:cNvPr id="4" name="Imagen 3">
             <a:extLst>
               <a:ext uri="{FF2B5EF4-FFF2-40B4-BE49-F238E27FC236}">
-                <a16:creationId xmlns:a16="http://schemas.microsoft.com/office/drawing/2014/main" id="{7A6A72AE-EFE7-4BC0-11C5-7D078E053EC9}"/>
+                <a16:creationId xmlns:a16="http://schemas.microsoft.com/office/drawing/2014/main" id="{AB795206-768E-ADBC-0C06-AB0284E14A75}"/>
               </a:ext>
             </a:extLst>
           </p:cNvPr>
@@ -6962,8 +6961,8 @@
         </p:blipFill>
         <p:spPr>
           <a:xfrm>
-            <a:off x="-1" y="499043"/>
-            <a:ext cx="9144000" cy="4288290"/>
+            <a:off x="0" y="510849"/>
+            <a:ext cx="9144000" cy="4409801"/>
           </a:xfrm>
           <a:prstGeom prst="rect">
             <a:avLst/>
@@ -6984,110 +6983,6 @@
 </file>
 
 <file path=ppt/slides/slide15.xml><?xml version="1.0" encoding="utf-8"?>
-<p:sld xmlns:a="http://schemas.openxmlformats.org/drawingml/2006/main" xmlns:r="http://schemas.openxmlformats.org/officeDocument/2006/relationships" xmlns:p="http://schemas.openxmlformats.org/presentationml/2006/main">
-  <p:cSld>
-    <p:spTree>
-      <p:nvGrpSpPr>
-        <p:cNvPr id="1" name="">
-          <a:extLst>
-            <a:ext uri="{FF2B5EF4-FFF2-40B4-BE49-F238E27FC236}">
-              <a16:creationId xmlns:a16="http://schemas.microsoft.com/office/drawing/2014/main" id="{86CA0A3B-2932-AFD4-DA44-C1DC3779E581}"/>
-            </a:ext>
-          </a:extLst>
-        </p:cNvPr>
-        <p:cNvGrpSpPr/>
-        <p:nvPr/>
-      </p:nvGrpSpPr>
-      <p:grpSpPr>
-        <a:xfrm>
-          <a:off x="0" y="0"/>
-          <a:ext cx="0" cy="0"/>
-          <a:chOff x="0" y="0"/>
-          <a:chExt cx="0" cy="0"/>
-        </a:xfrm>
-      </p:grpSpPr>
-      <p:sp>
-        <p:nvSpPr>
-          <p:cNvPr id="6" name="CuadroTexto 5">
-            <a:extLst>
-              <a:ext uri="{FF2B5EF4-FFF2-40B4-BE49-F238E27FC236}">
-                <a16:creationId xmlns:a16="http://schemas.microsoft.com/office/drawing/2014/main" id="{95670A3C-A776-65F2-DF24-F6228170D173}"/>
-              </a:ext>
-            </a:extLst>
-          </p:cNvPr>
-          <p:cNvSpPr txBox="1"/>
-          <p:nvPr/>
-        </p:nvSpPr>
-        <p:spPr>
-          <a:xfrm>
-            <a:off x="1926166" y="88135"/>
-            <a:ext cx="5291667" cy="307777"/>
-          </a:xfrm>
-          <a:prstGeom prst="rect">
-            <a:avLst/>
-          </a:prstGeom>
-          <a:noFill/>
-        </p:spPr>
-        <p:txBody>
-          <a:bodyPr wrap="square" rtlCol="0">
-            <a:spAutoFit/>
-          </a:bodyPr>
-          <a:lstStyle/>
-          <a:p>
-            <a:pPr algn="ctr"/>
-            <a:r>
-              <a:rPr lang="es-MX" b="1" dirty="0">
-                <a:latin typeface="Montserrat" pitchFamily="2" charset="0"/>
-              </a:rPr>
-              <a:t>Temas de gobierno por radiodifusora</a:t>
-            </a:r>
-          </a:p>
-        </p:txBody>
-      </p:sp>
-      <p:pic>
-        <p:nvPicPr>
-          <p:cNvPr id="4" name="Imagen 3">
-            <a:extLst>
-              <a:ext uri="{FF2B5EF4-FFF2-40B4-BE49-F238E27FC236}">
-                <a16:creationId xmlns:a16="http://schemas.microsoft.com/office/drawing/2014/main" id="{25543B6B-D7F3-A44C-8443-0930A4237AEE}"/>
-              </a:ext>
-            </a:extLst>
-          </p:cNvPr>
-          <p:cNvPicPr>
-            <a:picLocks noChangeAspect="1"/>
-          </p:cNvPicPr>
-          <p:nvPr/>
-        </p:nvPicPr>
-        <p:blipFill>
-          <a:blip r:embed="rId2"/>
-          <a:stretch>
-            <a:fillRect/>
-          </a:stretch>
-        </p:blipFill>
-        <p:spPr>
-          <a:xfrm>
-            <a:off x="0" y="999279"/>
-            <a:ext cx="9144000" cy="3287817"/>
-          </a:xfrm>
-          <a:prstGeom prst="rect">
-            <a:avLst/>
-          </a:prstGeom>
-        </p:spPr>
-      </p:pic>
-    </p:spTree>
-    <p:extLst>
-      <p:ext uri="{BB962C8B-B14F-4D97-AF65-F5344CB8AC3E}">
-        <p14:creationId xmlns:p14="http://schemas.microsoft.com/office/powerpoint/2010/main" val="3862533563"/>
-      </p:ext>
-    </p:extLst>
-  </p:cSld>
-  <p:clrMapOvr>
-    <a:masterClrMapping/>
-  </p:clrMapOvr>
-</p:sld>
-</file>
-
-<file path=ppt/slides/slide16.xml><?xml version="1.0" encoding="utf-8"?>
 <p:sld xmlns:a="http://schemas.openxmlformats.org/drawingml/2006/main" xmlns:r="http://schemas.openxmlformats.org/officeDocument/2006/relationships" xmlns:p="http://schemas.openxmlformats.org/presentationml/2006/main">
   <p:cSld>
     <p:spTree>
@@ -7144,10 +7039,10 @@
       </p:sp>
       <p:pic>
         <p:nvPicPr>
-          <p:cNvPr id="3" name="Imagen 2">
+          <p:cNvPr id="4" name="Imagen 3">
             <a:extLst>
               <a:ext uri="{FF2B5EF4-FFF2-40B4-BE49-F238E27FC236}">
-                <a16:creationId xmlns:a16="http://schemas.microsoft.com/office/drawing/2014/main" id="{78510FE5-AAA2-4BFD-87B4-BEB31BF52304}"/>
+                <a16:creationId xmlns:a16="http://schemas.microsoft.com/office/drawing/2014/main" id="{F361DA47-C5E9-59BA-B1E5-B60066A8ED30}"/>
               </a:ext>
             </a:extLst>
           </p:cNvPr>
@@ -7164,8 +7059,8 @@
         </p:blipFill>
         <p:spPr>
           <a:xfrm>
-            <a:off x="129560" y="776027"/>
-            <a:ext cx="8811855" cy="3734321"/>
+            <a:off x="2933477" y="0"/>
+            <a:ext cx="3277046" cy="5143500"/>
           </a:xfrm>
           <a:prstGeom prst="rect">
             <a:avLst/>
@@ -7185,7 +7080,7 @@
 </p:sld>
 </file>
 
-<file path=ppt/slides/slide17.xml><?xml version="1.0" encoding="utf-8"?>
+<file path=ppt/slides/slide16.xml><?xml version="1.0" encoding="utf-8"?>
 <p:sld xmlns:a="http://schemas.openxmlformats.org/drawingml/2006/main" xmlns:r="http://schemas.openxmlformats.org/officeDocument/2006/relationships" xmlns:p="http://schemas.openxmlformats.org/presentationml/2006/main">
   <p:cSld>
     <p:spTree>
